--- a/3 am/الصيغ 2/cours 6/عرض الدرس.pptx
+++ b/3 am/الصيغ 2/cours 6/عرض الدرس.pptx
@@ -248,7 +248,7 @@
           <a:p>
             <a:fld id="{33E46DBA-FA3B-4C5F-B700-4671668DAB72}" type="datetimeFigureOut">
               <a:rPr lang="fr-FR" smtClean="0"/>
-              <a:t>13/01/2025</a:t>
+              <a:t>14/01/2025</a:t>
             </a:fld>
             <a:endParaRPr lang="fr-FR"/>
           </a:p>
@@ -418,7 +418,7 @@
           <a:p>
             <a:fld id="{33E46DBA-FA3B-4C5F-B700-4671668DAB72}" type="datetimeFigureOut">
               <a:rPr lang="fr-FR" smtClean="0"/>
-              <a:t>13/01/2025</a:t>
+              <a:t>14/01/2025</a:t>
             </a:fld>
             <a:endParaRPr lang="fr-FR"/>
           </a:p>
@@ -598,7 +598,7 @@
           <a:p>
             <a:fld id="{33E46DBA-FA3B-4C5F-B700-4671668DAB72}" type="datetimeFigureOut">
               <a:rPr lang="fr-FR" smtClean="0"/>
-              <a:t>13/01/2025</a:t>
+              <a:t>14/01/2025</a:t>
             </a:fld>
             <a:endParaRPr lang="fr-FR"/>
           </a:p>
@@ -768,7 +768,7 @@
           <a:p>
             <a:fld id="{33E46DBA-FA3B-4C5F-B700-4671668DAB72}" type="datetimeFigureOut">
               <a:rPr lang="fr-FR" smtClean="0"/>
-              <a:t>13/01/2025</a:t>
+              <a:t>14/01/2025</a:t>
             </a:fld>
             <a:endParaRPr lang="fr-FR"/>
           </a:p>
@@ -1014,7 +1014,7 @@
           <a:p>
             <a:fld id="{33E46DBA-FA3B-4C5F-B700-4671668DAB72}" type="datetimeFigureOut">
               <a:rPr lang="fr-FR" smtClean="0"/>
-              <a:t>13/01/2025</a:t>
+              <a:t>14/01/2025</a:t>
             </a:fld>
             <a:endParaRPr lang="fr-FR"/>
           </a:p>
@@ -1246,7 +1246,7 @@
           <a:p>
             <a:fld id="{33E46DBA-FA3B-4C5F-B700-4671668DAB72}" type="datetimeFigureOut">
               <a:rPr lang="fr-FR" smtClean="0"/>
-              <a:t>13/01/2025</a:t>
+              <a:t>14/01/2025</a:t>
             </a:fld>
             <a:endParaRPr lang="fr-FR"/>
           </a:p>
@@ -1613,7 +1613,7 @@
           <a:p>
             <a:fld id="{33E46DBA-FA3B-4C5F-B700-4671668DAB72}" type="datetimeFigureOut">
               <a:rPr lang="fr-FR" smtClean="0"/>
-              <a:t>13/01/2025</a:t>
+              <a:t>14/01/2025</a:t>
             </a:fld>
             <a:endParaRPr lang="fr-FR"/>
           </a:p>
@@ -1731,7 +1731,7 @@
           <a:p>
             <a:fld id="{33E46DBA-FA3B-4C5F-B700-4671668DAB72}" type="datetimeFigureOut">
               <a:rPr lang="fr-FR" smtClean="0"/>
-              <a:t>13/01/2025</a:t>
+              <a:t>14/01/2025</a:t>
             </a:fld>
             <a:endParaRPr lang="fr-FR"/>
           </a:p>
@@ -1826,7 +1826,7 @@
           <a:p>
             <a:fld id="{33E46DBA-FA3B-4C5F-B700-4671668DAB72}" type="datetimeFigureOut">
               <a:rPr lang="fr-FR" smtClean="0"/>
-              <a:t>13/01/2025</a:t>
+              <a:t>14/01/2025</a:t>
             </a:fld>
             <a:endParaRPr lang="fr-FR"/>
           </a:p>
@@ -2103,7 +2103,7 @@
           <a:p>
             <a:fld id="{33E46DBA-FA3B-4C5F-B700-4671668DAB72}" type="datetimeFigureOut">
               <a:rPr lang="fr-FR" smtClean="0"/>
-              <a:t>13/01/2025</a:t>
+              <a:t>14/01/2025</a:t>
             </a:fld>
             <a:endParaRPr lang="fr-FR"/>
           </a:p>
@@ -2356,7 +2356,7 @@
           <a:p>
             <a:fld id="{33E46DBA-FA3B-4C5F-B700-4671668DAB72}" type="datetimeFigureOut">
               <a:rPr lang="fr-FR" smtClean="0"/>
-              <a:t>13/01/2025</a:t>
+              <a:t>14/01/2025</a:t>
             </a:fld>
             <a:endParaRPr lang="fr-FR"/>
           </a:p>
@@ -2569,7 +2569,7 @@
           <a:p>
             <a:fld id="{33E46DBA-FA3B-4C5F-B700-4671668DAB72}" type="datetimeFigureOut">
               <a:rPr lang="fr-FR" smtClean="0"/>
-              <a:t>13/01/2025</a:t>
+              <a:t>14/01/2025</a:t>
             </a:fld>
             <a:endParaRPr lang="fr-FR"/>
           </a:p>
@@ -2982,8 +2982,8 @@
         </p:nvSpPr>
         <p:spPr>
           <a:xfrm>
-            <a:off x="1626444" y="2462187"/>
-            <a:ext cx="9672033" cy="2585323"/>
+            <a:off x="1714125" y="1236494"/>
+            <a:ext cx="9877754" cy="646331"/>
           </a:xfrm>
           <a:prstGeom prst="rect">
             <a:avLst/>
@@ -3001,46 +3001,13 @@
               <a:buChar char="ü"/>
             </a:pPr>
             <a:r>
-              <a:rPr lang="ar-DZ" sz="5400" dirty="0" smtClean="0"/>
-              <a:t>ماذا نقصد بالصيغة ؟ </a:t>
-            </a:r>
-          </a:p>
-          <a:p>
-            <a:pPr marL="685800" lvl="0" indent="-685800" algn="r" rtl="1">
-              <a:buFont typeface="Wingdings" panose="05000000000000000000" pitchFamily="2" charset="2"/>
-              <a:buChar char="ü"/>
-            </a:pPr>
-            <a:r>
-              <a:rPr lang="ar-DZ" sz="5400" dirty="0" smtClean="0"/>
-              <a:t>كيف </a:t>
-            </a:r>
-            <a:r>
-              <a:rPr lang="ar-DZ" sz="5400" dirty="0"/>
-              <a:t>يمكن كتابتها </a:t>
-            </a:r>
-            <a:r>
-              <a:rPr lang="ar-DZ" sz="5400" dirty="0" smtClean="0"/>
+              <a:rPr lang="ar-DZ" sz="3600" dirty="0" smtClean="0"/>
+              <a:t>ماذا نقصد بالصيغة </a:t>
+            </a:r>
+            <a:r>
+              <a:rPr lang="ar-DZ" sz="3600" dirty="0" smtClean="0"/>
               <a:t>؟</a:t>
             </a:r>
-          </a:p>
-          <a:p>
-            <a:pPr marL="685800" lvl="0" indent="-685800" algn="r" rtl="1">
-              <a:buFont typeface="Wingdings" panose="05000000000000000000" pitchFamily="2" charset="2"/>
-              <a:buChar char="ü"/>
-            </a:pPr>
-            <a:r>
-              <a:rPr lang="ar-DZ" sz="5400" dirty="0" smtClean="0"/>
-              <a:t> </a:t>
-            </a:r>
-            <a:r>
-              <a:rPr lang="ar-DZ" sz="5400" dirty="0"/>
-              <a:t>و ما أنواعها </a:t>
-            </a:r>
-            <a:r>
-              <a:rPr lang="ar-SA" sz="5400" dirty="0"/>
-              <a:t>؟</a:t>
-            </a:r>
-            <a:endParaRPr lang="fr-FR" sz="5400" b="1" dirty="0"/>
           </a:p>
         </p:txBody>
       </p:sp>
@@ -3052,8 +3019,8 @@
         </p:nvSpPr>
         <p:spPr>
           <a:xfrm>
-            <a:off x="6250488" y="520673"/>
-            <a:ext cx="5047989" cy="936667"/>
+            <a:off x="6250486" y="213739"/>
+            <a:ext cx="5341393" cy="842795"/>
           </a:xfrm>
           <a:prstGeom prst="rect">
             <a:avLst/>
@@ -3075,20 +3042,372 @@
               </a:spcAft>
             </a:pPr>
             <a:r>
-              <a:rPr lang="ar-SA" sz="5400" b="1" u="sng" dirty="0">
+              <a:rPr lang="ar-SA" sz="4800" b="1" u="sng" dirty="0">
                 <a:solidFill>
                   <a:srgbClr val="00B0F0"/>
                 </a:solidFill>
               </a:rPr>
               <a:t>تغذية راجعة :</a:t>
             </a:r>
-            <a:endParaRPr lang="en-US" sz="4400" b="1" dirty="0">
+            <a:endParaRPr lang="en-US" sz="4000" b="1" dirty="0">
               <a:solidFill>
                 <a:srgbClr val="00B0F0"/>
               </a:solidFill>
               <a:latin typeface="Calibri" panose="020F0502020204030204" pitchFamily="34" charset="0"/>
               <a:ea typeface="Calibri" panose="020F0502020204030204" pitchFamily="34" charset="0"/>
               <a:cs typeface="Arial" panose="020B0604020202020204" pitchFamily="34" charset="0"/>
+            </a:endParaRPr>
+          </a:p>
+        </p:txBody>
+      </p:sp>
+      <p:sp>
+        <p:nvSpPr>
+          <p:cNvPr id="2" name="ZoneTexte 1"/>
+          <p:cNvSpPr txBox="1"/>
+          <p:nvPr/>
+        </p:nvSpPr>
+        <p:spPr>
+          <a:xfrm>
+            <a:off x="225466" y="1882825"/>
+            <a:ext cx="11366413" cy="954107"/>
+          </a:xfrm>
+          <a:prstGeom prst="rect">
+            <a:avLst/>
+          </a:prstGeom>
+          <a:noFill/>
+        </p:spPr>
+        <p:txBody>
+          <a:bodyPr wrap="square" rtlCol="1">
+            <a:spAutoFit/>
+          </a:bodyPr>
+          <a:lstStyle/>
+          <a:p>
+            <a:pPr lvl="0" algn="r" rtl="1"/>
+            <a:r>
+              <a:rPr lang="ar-DZ" sz="2800" b="1" dirty="0">
+                <a:solidFill>
+                  <a:srgbClr val="FF0000"/>
+                </a:solidFill>
+              </a:rPr>
+              <a:t>هي عبارة حسابية أو منطقية مكونة من أعداد أو مراجع الخلايا تطبق عليها عمليات حسابية مثل (+ ، - ، </a:t>
+            </a:r>
+            <a:r>
+              <a:rPr lang="fr-FR" sz="2800" b="1" dirty="0">
+                <a:solidFill>
+                  <a:srgbClr val="FF0000"/>
+                </a:solidFill>
+              </a:rPr>
+              <a:t>*</a:t>
+            </a:r>
+            <a:r>
+              <a:rPr lang="ar-DZ" sz="2800" b="1" dirty="0">
+                <a:solidFill>
+                  <a:srgbClr val="FF0000"/>
+                </a:solidFill>
+              </a:rPr>
+              <a:t> ، </a:t>
+            </a:r>
+            <a:r>
+              <a:rPr lang="fr-FR" sz="2800" b="1" dirty="0">
+                <a:solidFill>
+                  <a:srgbClr val="FF0000"/>
+                </a:solidFill>
+              </a:rPr>
+              <a:t>/</a:t>
+            </a:r>
+            <a:r>
+              <a:rPr lang="ar-DZ" sz="2800" b="1" dirty="0">
+                <a:solidFill>
+                  <a:srgbClr val="FF0000"/>
+                </a:solidFill>
+              </a:rPr>
+              <a:t> ) أو منطقية مثل (و ، أو</a:t>
+            </a:r>
+            <a:r>
+              <a:rPr lang="ar-DZ" sz="2800" b="1" dirty="0" smtClean="0">
+                <a:solidFill>
+                  <a:srgbClr val="FF0000"/>
+                </a:solidFill>
+              </a:rPr>
+              <a:t>)</a:t>
+            </a:r>
+            <a:endParaRPr lang="ar-DZ" sz="2800" b="1" dirty="0">
+              <a:solidFill>
+                <a:srgbClr val="FF0000"/>
+              </a:solidFill>
+            </a:endParaRPr>
+          </a:p>
+        </p:txBody>
+      </p:sp>
+      <p:sp>
+        <p:nvSpPr>
+          <p:cNvPr id="3" name="ZoneTexte 2"/>
+          <p:cNvSpPr txBox="1"/>
+          <p:nvPr/>
+        </p:nvSpPr>
+        <p:spPr>
+          <a:xfrm>
+            <a:off x="225466" y="2951142"/>
+            <a:ext cx="11366413" cy="646331"/>
+          </a:xfrm>
+          <a:prstGeom prst="rect">
+            <a:avLst/>
+          </a:prstGeom>
+          <a:noFill/>
+        </p:spPr>
+        <p:txBody>
+          <a:bodyPr wrap="square" rtlCol="1">
+            <a:spAutoFit/>
+          </a:bodyPr>
+          <a:lstStyle/>
+          <a:p>
+            <a:pPr marL="571500" lvl="0" indent="-571500" algn="r" rtl="1">
+              <a:buFont typeface="Wingdings" panose="05000000000000000000" pitchFamily="2" charset="2"/>
+              <a:buChar char="ü"/>
+            </a:pPr>
+            <a:r>
+              <a:rPr lang="ar-DZ" sz="3600" dirty="0" smtClean="0"/>
+              <a:t>ما هي مراحل كتابتها ؟</a:t>
+            </a:r>
+            <a:endParaRPr lang="ar-DZ" sz="3600" dirty="0"/>
+          </a:p>
+        </p:txBody>
+      </p:sp>
+      <p:sp>
+        <p:nvSpPr>
+          <p:cNvPr id="4" name="Rectangle 3"/>
+          <p:cNvSpPr/>
+          <p:nvPr/>
+        </p:nvSpPr>
+        <p:spPr>
+          <a:xfrm>
+            <a:off x="8646842" y="5436307"/>
+            <a:ext cx="2945037" cy="646331"/>
+          </a:xfrm>
+          <a:prstGeom prst="rect">
+            <a:avLst/>
+          </a:prstGeom>
+        </p:spPr>
+        <p:txBody>
+          <a:bodyPr wrap="none">
+            <a:spAutoFit/>
+          </a:bodyPr>
+          <a:lstStyle/>
+          <a:p>
+            <a:pPr marL="685800" lvl="0" indent="-685800" algn="r" rtl="1">
+              <a:buFont typeface="Wingdings" panose="05000000000000000000" pitchFamily="2" charset="2"/>
+              <a:buChar char="ü"/>
+            </a:pPr>
+            <a:r>
+              <a:rPr lang="ar-DZ" sz="3600" dirty="0"/>
+              <a:t>و ما أنواعها </a:t>
+            </a:r>
+            <a:r>
+              <a:rPr lang="ar-SA" sz="3600" dirty="0"/>
+              <a:t>؟</a:t>
+            </a:r>
+            <a:endParaRPr lang="fr-FR" sz="3600" b="1" dirty="0"/>
+          </a:p>
+        </p:txBody>
+      </p:sp>
+      <p:sp>
+        <p:nvSpPr>
+          <p:cNvPr id="6" name="Rectangle 5"/>
+          <p:cNvSpPr/>
+          <p:nvPr/>
+        </p:nvSpPr>
+        <p:spPr>
+          <a:xfrm>
+            <a:off x="1954058" y="3597473"/>
+            <a:ext cx="9637821" cy="1815882"/>
+          </a:xfrm>
+          <a:prstGeom prst="rect">
+            <a:avLst/>
+          </a:prstGeom>
+        </p:spPr>
+        <p:txBody>
+          <a:bodyPr wrap="square">
+            <a:spAutoFit/>
+          </a:bodyPr>
+          <a:lstStyle/>
+          <a:p>
+            <a:pPr marL="457200" indent="-457200" algn="r" rtl="1">
+              <a:buFontTx/>
+              <a:buChar char="-"/>
+            </a:pPr>
+            <a:r>
+              <a:rPr lang="ar-DZ" sz="2800" b="1" dirty="0" smtClean="0">
+                <a:solidFill>
+                  <a:srgbClr val="FF0000"/>
+                </a:solidFill>
+              </a:rPr>
+              <a:t>نحدد </a:t>
+            </a:r>
+            <a:r>
+              <a:rPr lang="ar-DZ" sz="2800" b="1" dirty="0">
+                <a:solidFill>
+                  <a:srgbClr val="FF0000"/>
+                </a:solidFill>
+              </a:rPr>
+              <a:t>اللغة </a:t>
+            </a:r>
+            <a:r>
+              <a:rPr lang="ar-DZ" sz="2800" b="1" dirty="0" smtClean="0">
+                <a:solidFill>
+                  <a:srgbClr val="FF0000"/>
+                </a:solidFill>
+              </a:rPr>
+              <a:t>الفرنسية.</a:t>
+            </a:r>
+          </a:p>
+          <a:p>
+            <a:pPr marL="457200" indent="-457200" algn="r" rtl="1">
+              <a:buFontTx/>
+              <a:buChar char="-"/>
+            </a:pPr>
+            <a:r>
+              <a:rPr lang="ar-DZ" sz="2800" b="1" dirty="0" smtClean="0">
+                <a:solidFill>
+                  <a:srgbClr val="FF0000"/>
+                </a:solidFill>
+              </a:rPr>
+              <a:t>نحدد </a:t>
+            </a:r>
+            <a:r>
+              <a:rPr lang="ar-DZ" sz="2800" b="1" dirty="0">
+                <a:solidFill>
+                  <a:srgbClr val="FF0000"/>
+                </a:solidFill>
+              </a:rPr>
+              <a:t>الخلية التي نريد أن تظهر فيها </a:t>
+            </a:r>
+            <a:r>
+              <a:rPr lang="ar-DZ" sz="2800" b="1" dirty="0" smtClean="0">
+                <a:solidFill>
+                  <a:srgbClr val="FF0000"/>
+                </a:solidFill>
+              </a:rPr>
+              <a:t>النتيجة.</a:t>
+            </a:r>
+          </a:p>
+          <a:p>
+            <a:pPr marL="457200" indent="-457200" algn="r" rtl="1">
+              <a:buFontTx/>
+              <a:buChar char="-"/>
+            </a:pPr>
+            <a:r>
+              <a:rPr lang="ar-DZ" sz="2800" b="1" dirty="0" smtClean="0">
+                <a:solidFill>
+                  <a:srgbClr val="FF0000"/>
+                </a:solidFill>
+              </a:rPr>
+              <a:t>نكتب </a:t>
+            </a:r>
+            <a:r>
+              <a:rPr lang="ar-DZ" sz="2800" b="1" dirty="0">
+                <a:solidFill>
+                  <a:srgbClr val="FF0000"/>
+                </a:solidFill>
+              </a:rPr>
+              <a:t>الرمز = متبوعا بالعملية مثل </a:t>
+            </a:r>
+            <a:r>
+              <a:rPr lang="ar-DZ" sz="2800" b="1" dirty="0" smtClean="0">
+                <a:solidFill>
+                  <a:srgbClr val="FF0000"/>
+                </a:solidFill>
+              </a:rPr>
+              <a:t>: </a:t>
+            </a:r>
+            <a:r>
+              <a:rPr lang="fr-FR" sz="2800" b="1" dirty="0" smtClean="0">
+                <a:solidFill>
+                  <a:srgbClr val="FF0000"/>
+                </a:solidFill>
+              </a:rPr>
+              <a:t>=10+5</a:t>
+            </a:r>
+            <a:endParaRPr lang="ar-DZ" sz="2800" b="1" dirty="0" smtClean="0">
+              <a:solidFill>
+                <a:srgbClr val="FF0000"/>
+              </a:solidFill>
+            </a:endParaRPr>
+          </a:p>
+          <a:p>
+            <a:pPr marL="457200" indent="-457200" algn="r" rtl="1">
+              <a:buFontTx/>
+              <a:buChar char="-"/>
+            </a:pPr>
+            <a:r>
+              <a:rPr lang="ar-DZ" sz="2800" b="1" dirty="0" smtClean="0">
+                <a:solidFill>
+                  <a:srgbClr val="FF0000"/>
+                </a:solidFill>
+              </a:rPr>
+              <a:t>نضغط </a:t>
+            </a:r>
+            <a:r>
+              <a:rPr lang="ar-DZ" sz="2800" b="1" dirty="0">
+                <a:solidFill>
+                  <a:srgbClr val="FF0000"/>
+                </a:solidFill>
+              </a:rPr>
+              <a:t>على </a:t>
+            </a:r>
+            <a:r>
+              <a:rPr lang="ar-DZ" sz="2800" b="1" dirty="0" err="1">
+                <a:solidFill>
+                  <a:srgbClr val="FF0000"/>
+                </a:solidFill>
+              </a:rPr>
+              <a:t>Entrée</a:t>
+            </a:r>
+            <a:r>
+              <a:rPr lang="ar-DZ" sz="2800" b="1" dirty="0">
+                <a:solidFill>
+                  <a:srgbClr val="FF0000"/>
+                </a:solidFill>
+              </a:rPr>
+              <a:t> فتظهر النتيجة.</a:t>
+            </a:r>
+          </a:p>
+        </p:txBody>
+      </p:sp>
+      <p:sp>
+        <p:nvSpPr>
+          <p:cNvPr id="8" name="ZoneTexte 7"/>
+          <p:cNvSpPr txBox="1"/>
+          <p:nvPr/>
+        </p:nvSpPr>
+        <p:spPr>
+          <a:xfrm>
+            <a:off x="1412602" y="6059686"/>
+            <a:ext cx="10179277" cy="523220"/>
+          </a:xfrm>
+          <a:prstGeom prst="rect">
+            <a:avLst/>
+          </a:prstGeom>
+          <a:noFill/>
+        </p:spPr>
+        <p:txBody>
+          <a:bodyPr wrap="square" rtlCol="1">
+            <a:spAutoFit/>
+          </a:bodyPr>
+          <a:lstStyle/>
+          <a:p>
+            <a:pPr algn="r" rtl="1"/>
+            <a:r>
+              <a:rPr lang="ar-DZ" sz="2800" b="1" dirty="0" smtClean="0">
+                <a:solidFill>
+                  <a:srgbClr val="FF0000"/>
+                </a:solidFill>
+              </a:rPr>
+              <a:t>مباشرة و غير مباشرة</a:t>
+            </a:r>
+            <a:endParaRPr lang="ar-DZ" sz="2800" b="1" dirty="0">
+              <a:solidFill>
+                <a:srgbClr val="FF0000"/>
+              </a:solidFill>
             </a:endParaRPr>
           </a:p>
         </p:txBody>
@@ -3114,9 +3433,358 @@
   <p:timing>
     <p:tnLst>
       <p:par>
-        <p:cTn id="1" dur="indefinite" restart="never" nodeType="tmRoot"/>
+        <p:cTn id="1" dur="indefinite" restart="never" nodeType="tmRoot">
+          <p:childTnLst>
+            <p:seq concurrent="1" nextAc="seek">
+              <p:cTn id="2" dur="indefinite" nodeType="mainSeq">
+                <p:childTnLst>
+                  <p:par>
+                    <p:cTn id="3" fill="hold">
+                      <p:stCondLst>
+                        <p:cond delay="indefinite"/>
+                      </p:stCondLst>
+                      <p:childTnLst>
+                        <p:par>
+                          <p:cTn id="4" fill="hold">
+                            <p:stCondLst>
+                              <p:cond delay="0"/>
+                            </p:stCondLst>
+                            <p:childTnLst>
+                              <p:par>
+                                <p:cTn id="5" presetID="10" presetClass="entr" presetSubtype="0" fill="hold" grpId="0" nodeType="clickEffect">
+                                  <p:stCondLst>
+                                    <p:cond delay="0"/>
+                                  </p:stCondLst>
+                                  <p:childTnLst>
+                                    <p:set>
+                                      <p:cBhvr>
+                                        <p:cTn id="6" dur="1" fill="hold">
+                                          <p:stCondLst>
+                                            <p:cond delay="0"/>
+                                          </p:stCondLst>
+                                        </p:cTn>
+                                        <p:tgtEl>
+                                          <p:spTgt spid="5"/>
+                                        </p:tgtEl>
+                                        <p:attrNameLst>
+                                          <p:attrName>style.visibility</p:attrName>
+                                        </p:attrNameLst>
+                                      </p:cBhvr>
+                                      <p:to>
+                                        <p:strVal val="visible"/>
+                                      </p:to>
+                                    </p:set>
+                                    <p:animEffect transition="in" filter="fade">
+                                      <p:cBhvr>
+                                        <p:cTn id="7" dur="500"/>
+                                        <p:tgtEl>
+                                          <p:spTgt spid="5"/>
+                                        </p:tgtEl>
+                                      </p:cBhvr>
+                                    </p:animEffect>
+                                  </p:childTnLst>
+                                </p:cTn>
+                              </p:par>
+                            </p:childTnLst>
+                          </p:cTn>
+                        </p:par>
+                      </p:childTnLst>
+                    </p:cTn>
+                  </p:par>
+                  <p:par>
+                    <p:cTn id="8" fill="hold">
+                      <p:stCondLst>
+                        <p:cond delay="indefinite"/>
+                      </p:stCondLst>
+                      <p:childTnLst>
+                        <p:par>
+                          <p:cTn id="9" fill="hold">
+                            <p:stCondLst>
+                              <p:cond delay="0"/>
+                            </p:stCondLst>
+                            <p:childTnLst>
+                              <p:par>
+                                <p:cTn id="10" presetID="10" presetClass="entr" presetSubtype="0" fill="hold" grpId="0" nodeType="clickEffect">
+                                  <p:stCondLst>
+                                    <p:cond delay="0"/>
+                                  </p:stCondLst>
+                                  <p:childTnLst>
+                                    <p:set>
+                                      <p:cBhvr>
+                                        <p:cTn id="11" dur="1" fill="hold">
+                                          <p:stCondLst>
+                                            <p:cond delay="0"/>
+                                          </p:stCondLst>
+                                        </p:cTn>
+                                        <p:tgtEl>
+                                          <p:spTgt spid="2"/>
+                                        </p:tgtEl>
+                                        <p:attrNameLst>
+                                          <p:attrName>style.visibility</p:attrName>
+                                        </p:attrNameLst>
+                                      </p:cBhvr>
+                                      <p:to>
+                                        <p:strVal val="visible"/>
+                                      </p:to>
+                                    </p:set>
+                                    <p:animEffect transition="in" filter="fade">
+                                      <p:cBhvr>
+                                        <p:cTn id="12" dur="500"/>
+                                        <p:tgtEl>
+                                          <p:spTgt spid="2"/>
+                                        </p:tgtEl>
+                                      </p:cBhvr>
+                                    </p:animEffect>
+                                  </p:childTnLst>
+                                </p:cTn>
+                              </p:par>
+                            </p:childTnLst>
+                          </p:cTn>
+                        </p:par>
+                      </p:childTnLst>
+                    </p:cTn>
+                  </p:par>
+                  <p:par>
+                    <p:cTn id="13" fill="hold">
+                      <p:stCondLst>
+                        <p:cond delay="indefinite"/>
+                      </p:stCondLst>
+                      <p:childTnLst>
+                        <p:par>
+                          <p:cTn id="14" fill="hold">
+                            <p:stCondLst>
+                              <p:cond delay="0"/>
+                            </p:stCondLst>
+                            <p:childTnLst>
+                              <p:par>
+                                <p:cTn id="15" presetID="10" presetClass="entr" presetSubtype="0" fill="hold" grpId="0" nodeType="clickEffect">
+                                  <p:stCondLst>
+                                    <p:cond delay="0"/>
+                                  </p:stCondLst>
+                                  <p:childTnLst>
+                                    <p:set>
+                                      <p:cBhvr>
+                                        <p:cTn id="16" dur="1" fill="hold">
+                                          <p:stCondLst>
+                                            <p:cond delay="0"/>
+                                          </p:stCondLst>
+                                        </p:cTn>
+                                        <p:tgtEl>
+                                          <p:spTgt spid="3"/>
+                                        </p:tgtEl>
+                                        <p:attrNameLst>
+                                          <p:attrName>style.visibility</p:attrName>
+                                        </p:attrNameLst>
+                                      </p:cBhvr>
+                                      <p:to>
+                                        <p:strVal val="visible"/>
+                                      </p:to>
+                                    </p:set>
+                                    <p:animEffect transition="in" filter="fade">
+                                      <p:cBhvr>
+                                        <p:cTn id="17" dur="500"/>
+                                        <p:tgtEl>
+                                          <p:spTgt spid="3"/>
+                                        </p:tgtEl>
+                                      </p:cBhvr>
+                                    </p:animEffect>
+                                  </p:childTnLst>
+                                </p:cTn>
+                              </p:par>
+                            </p:childTnLst>
+                          </p:cTn>
+                        </p:par>
+                      </p:childTnLst>
+                    </p:cTn>
+                  </p:par>
+                  <p:par>
+                    <p:cTn id="18" fill="hold">
+                      <p:stCondLst>
+                        <p:cond delay="indefinite"/>
+                      </p:stCondLst>
+                      <p:childTnLst>
+                        <p:par>
+                          <p:cTn id="19" fill="hold">
+                            <p:stCondLst>
+                              <p:cond delay="0"/>
+                            </p:stCondLst>
+                            <p:childTnLst>
+                              <p:par>
+                                <p:cTn id="20" presetID="10" presetClass="entr" presetSubtype="0" fill="hold" grpId="0" nodeType="clickEffect">
+                                  <p:stCondLst>
+                                    <p:cond delay="0"/>
+                                  </p:stCondLst>
+                                  <p:childTnLst>
+                                    <p:set>
+                                      <p:cBhvr>
+                                        <p:cTn id="21" dur="1" fill="hold">
+                                          <p:stCondLst>
+                                            <p:cond delay="0"/>
+                                          </p:stCondLst>
+                                        </p:cTn>
+                                        <p:tgtEl>
+                                          <p:spTgt spid="6"/>
+                                        </p:tgtEl>
+                                        <p:attrNameLst>
+                                          <p:attrName>style.visibility</p:attrName>
+                                        </p:attrNameLst>
+                                      </p:cBhvr>
+                                      <p:to>
+                                        <p:strVal val="visible"/>
+                                      </p:to>
+                                    </p:set>
+                                    <p:animEffect transition="in" filter="fade">
+                                      <p:cBhvr>
+                                        <p:cTn id="22" dur="500"/>
+                                        <p:tgtEl>
+                                          <p:spTgt spid="6"/>
+                                        </p:tgtEl>
+                                      </p:cBhvr>
+                                    </p:animEffect>
+                                  </p:childTnLst>
+                                </p:cTn>
+                              </p:par>
+                            </p:childTnLst>
+                          </p:cTn>
+                        </p:par>
+                      </p:childTnLst>
+                    </p:cTn>
+                  </p:par>
+                  <p:par>
+                    <p:cTn id="23" fill="hold">
+                      <p:stCondLst>
+                        <p:cond delay="indefinite"/>
+                      </p:stCondLst>
+                      <p:childTnLst>
+                        <p:par>
+                          <p:cTn id="24" fill="hold">
+                            <p:stCondLst>
+                              <p:cond delay="0"/>
+                            </p:stCondLst>
+                            <p:childTnLst>
+                              <p:par>
+                                <p:cTn id="25" presetID="10" presetClass="entr" presetSubtype="0" fill="hold" grpId="0" nodeType="clickEffect">
+                                  <p:stCondLst>
+                                    <p:cond delay="0"/>
+                                  </p:stCondLst>
+                                  <p:childTnLst>
+                                    <p:set>
+                                      <p:cBhvr>
+                                        <p:cTn id="26" dur="1" fill="hold">
+                                          <p:stCondLst>
+                                            <p:cond delay="0"/>
+                                          </p:stCondLst>
+                                        </p:cTn>
+                                        <p:tgtEl>
+                                          <p:spTgt spid="4"/>
+                                        </p:tgtEl>
+                                        <p:attrNameLst>
+                                          <p:attrName>style.visibility</p:attrName>
+                                        </p:attrNameLst>
+                                      </p:cBhvr>
+                                      <p:to>
+                                        <p:strVal val="visible"/>
+                                      </p:to>
+                                    </p:set>
+                                    <p:animEffect transition="in" filter="fade">
+                                      <p:cBhvr>
+                                        <p:cTn id="27" dur="500"/>
+                                        <p:tgtEl>
+                                          <p:spTgt spid="4"/>
+                                        </p:tgtEl>
+                                      </p:cBhvr>
+                                    </p:animEffect>
+                                  </p:childTnLst>
+                                </p:cTn>
+                              </p:par>
+                            </p:childTnLst>
+                          </p:cTn>
+                        </p:par>
+                      </p:childTnLst>
+                    </p:cTn>
+                  </p:par>
+                  <p:par>
+                    <p:cTn id="28" fill="hold">
+                      <p:stCondLst>
+                        <p:cond delay="indefinite"/>
+                      </p:stCondLst>
+                      <p:childTnLst>
+                        <p:par>
+                          <p:cTn id="29" fill="hold">
+                            <p:stCondLst>
+                              <p:cond delay="0"/>
+                            </p:stCondLst>
+                            <p:childTnLst>
+                              <p:par>
+                                <p:cTn id="30" presetID="10" presetClass="entr" presetSubtype="0" fill="hold" grpId="0" nodeType="clickEffect">
+                                  <p:stCondLst>
+                                    <p:cond delay="0"/>
+                                  </p:stCondLst>
+                                  <p:childTnLst>
+                                    <p:set>
+                                      <p:cBhvr>
+                                        <p:cTn id="31" dur="1" fill="hold">
+                                          <p:stCondLst>
+                                            <p:cond delay="0"/>
+                                          </p:stCondLst>
+                                        </p:cTn>
+                                        <p:tgtEl>
+                                          <p:spTgt spid="8"/>
+                                        </p:tgtEl>
+                                        <p:attrNameLst>
+                                          <p:attrName>style.visibility</p:attrName>
+                                        </p:attrNameLst>
+                                      </p:cBhvr>
+                                      <p:to>
+                                        <p:strVal val="visible"/>
+                                      </p:to>
+                                    </p:set>
+                                    <p:animEffect transition="in" filter="fade">
+                                      <p:cBhvr>
+                                        <p:cTn id="32" dur="500"/>
+                                        <p:tgtEl>
+                                          <p:spTgt spid="8"/>
+                                        </p:tgtEl>
+                                      </p:cBhvr>
+                                    </p:animEffect>
+                                  </p:childTnLst>
+                                </p:cTn>
+                              </p:par>
+                            </p:childTnLst>
+                          </p:cTn>
+                        </p:par>
+                      </p:childTnLst>
+                    </p:cTn>
+                  </p:par>
+                </p:childTnLst>
+              </p:cTn>
+              <p:prevCondLst>
+                <p:cond evt="onPrev" delay="0">
+                  <p:tgtEl>
+                    <p:sldTgt/>
+                  </p:tgtEl>
+                </p:cond>
+              </p:prevCondLst>
+              <p:nextCondLst>
+                <p:cond evt="onNext" delay="0">
+                  <p:tgtEl>
+                    <p:sldTgt/>
+                  </p:tgtEl>
+                </p:cond>
+              </p:nextCondLst>
+            </p:seq>
+          </p:childTnLst>
+        </p:cTn>
       </p:par>
     </p:tnLst>
+    <p:bldLst>
+      <p:bldP spid="5" grpId="0"/>
+      <p:bldP spid="2" grpId="0"/>
+      <p:bldP spid="3" grpId="0"/>
+      <p:bldP spid="4" grpId="0"/>
+      <p:bldP spid="6" grpId="0"/>
+      <p:bldP spid="8" grpId="0"/>
+    </p:bldLst>
   </p:timing>
 </p:sld>
 </file>
